--- a/classes/parte-11-devsecops-y-seguridad-del-sdlc/247-seguridad-de-apis-en-el-ciclo-de-desarrollo/clase-247-presentacion.pptx
+++ b/classes/parte-11-devsecops-y-seguridad-del-sdlc/247-seguridad-de-apis-en-el-ciclo-de-desarrollo/clase-247-presentacion.pptx
@@ -17,6 +17,10 @@
     <p:sldId id="265" r:id="rId16"/>
     <p:sldId id="266" r:id="rId17"/>
     <p:sldId id="267" r:id="rId18"/>
+    <p:sldId id="268" r:id="rId19"/>
+    <p:sldId id="269" r:id="rId20"/>
+    <p:sldId id="270" r:id="rId21"/>
+    <p:sldId id="271" r:id="rId22"/>
   </p:sldIdLst>
   <p:sldSz cx="9144000" cy="6858000" type="screen4x3"/>
   <p:notesSz cx="6858000" cy="9144000"/>
@@ -3198,7 +3202,7 @@
                   <a:srgbClr val="0B3D2E"/>
                 </a:solidFill>
               </a:rPr>
-              <a:t>⚠️ Errores comunes</a:t>
+              <a:t>🧪 Laboratorio guiado</a:t>
             </a:r>
           </a:p>
         </p:txBody>
@@ -3236,67 +3240,97 @@
                   <a:srgbClr val="22282E"/>
                 </a:solidFill>
               </a:rPr>
-              <a:t>•  Cambiar un ID en la URL devuelve datos de otro usuario — BOLA: falta autorización por objeto. Verifica propiedad en cada request.</a:t>
-            </a:r>
-          </a:p>
-          <a:p>
-            <a:pPr>
-              <a:spcAft>
-                <a:spcPts val="600"/>
-              </a:spcAft>
-            </a:pPr>
-            <a:r>
-              <a:rPr sz="1500">
-                <a:solidFill>
-                  <a:srgbClr val="22282E"/>
-                </a:solidFill>
-              </a:rPr>
-              <a:t>•  Un usuario normal accede a endpoints de admin — BFLA: control por función ausente. Deny-by-default y checks por rol.</a:t>
-            </a:r>
-          </a:p>
-          <a:p>
-            <a:pPr>
-              <a:spcAft>
-                <a:spcPts val="600"/>
-              </a:spcAft>
-            </a:pPr>
-            <a:r>
-              <a:rPr sz="1500">
-                <a:solidFill>
-                  <a:srgbClr val="22282E"/>
-                </a:solidFill>
-              </a:rPr>
-              <a:t>•  El cliente envía isadmin: true y funciona — Mass assignment. Usa allowlist de campos y additionalProperties: false.</a:t>
-            </a:r>
-          </a:p>
-          <a:p>
-            <a:pPr>
-              <a:spcAft>
-                <a:spcPts val="600"/>
-              </a:spcAft>
-            </a:pPr>
-            <a:r>
-              <a:rPr sz="1500">
-                <a:solidFill>
-                  <a:srgbClr val="22282E"/>
-                </a:solidFill>
-              </a:rPr>
-              <a:t>•  La API devuelve todo el objeto de usuario — Exposición excesiva de datos. Serializa solo los campos necesarios.</a:t>
-            </a:r>
-          </a:p>
-          <a:p>
-            <a:pPr>
-              <a:spcAft>
-                <a:spcPts val="600"/>
-              </a:spcAft>
-            </a:pPr>
-            <a:r>
-              <a:rPr sz="1500">
-                <a:solidFill>
-                  <a:srgbClr val="22282E"/>
-                </a:solidFill>
-              </a:rPr>
-              <a:t>•  Fuerza bruta al login sin límite — Falta rate limiting (API4). Añade límites por IP/usuario y backoff.</a:t>
+              <a:t>•  Levanta una API vulnerable de práctica (crAPI o VAmPI) en local.</a:t>
+            </a:r>
+          </a:p>
+          <a:p>
+            <a:pPr>
+              <a:spcAft>
+                <a:spcPts val="600"/>
+              </a:spcAft>
+            </a:pPr>
+            <a:r>
+              <a:rPr sz="1500">
+                <a:solidFill>
+                  <a:srgbClr val="22282E"/>
+                </a:solidFill>
+              </a:rPr>
+              <a:t>•  Explora BOLA. Autentícate como usuario A, pide tu recurso (GET /users/{idA}/profile), luego cambia el id por el de otro usuario. Si respondes con datos ajenos, es BOLA. Documenta la causa: falta de…</a:t>
+            </a:r>
+          </a:p>
+          <a:p>
+            <a:pPr>
+              <a:spcAft>
+                <a:spcPts val="600"/>
+              </a:spcAft>
+            </a:pPr>
+            <a:r>
+              <a:rPr sz="1500">
+                <a:solidFill>
+                  <a:srgbClr val="22282E"/>
+                </a:solidFill>
+              </a:rPr>
+              <a:t>•  Explora BFLA. Como usuario normal, intenta llamar un endpoint de admin (POST /admin/...). Si funciona, es BFLA.</a:t>
+            </a:r>
+          </a:p>
+          <a:p>
+            <a:pPr>
+              <a:spcAft>
+                <a:spcPts val="600"/>
+              </a:spcAft>
+            </a:pPr>
+            <a:r>
+              <a:rPr sz="1500">
+                <a:solidFill>
+                  <a:srgbClr val="22282E"/>
+                </a:solidFill>
+              </a:rPr>
+              <a:t>•  Diseña el contrato seguro. Escribe/ajusta el OpenAPI: define securitySchemes (bearer JWT), scopes por endpoint, esquemas de request con required y additionalProperties: false para evitar mass…</a:t>
+            </a:r>
+          </a:p>
+          <a:p>
+            <a:pPr>
+              <a:spcAft>
+                <a:spcPts val="600"/>
+              </a:spcAft>
+            </a:pPr>
+            <a:r>
+              <a:rPr sz="1500">
+                <a:solidFill>
+                  <a:srgbClr val="22282E"/>
+                </a:solidFill>
+              </a:rPr>
+              <a:t>•  Lintéalo con Spectral:</a:t>
+            </a:r>
+          </a:p>
+          <a:p>
+            <a:pPr>
+              <a:spcAft>
+                <a:spcPts val="600"/>
+              </a:spcAft>
+            </a:pPr>
+            <a:r>
+              <a:rPr sz="1500">
+                <a:solidFill>
+                  <a:srgbClr val="22282E"/>
+                </a:solidFill>
+              </a:rPr>
+              <a:t>•  Fuzzing basado en contrato:</a:t>
+            </a:r>
+          </a:p>
+          <a:p>
+            <a:pPr>
+              <a:spcAft>
+                <a:spcPts val="600"/>
+              </a:spcAft>
+            </a:pPr>
+            <a:r>
+              <a:rPr sz="1500">
+                <a:solidFill>
+                  <a:srgbClr val="22282E"/>
+                </a:solidFill>
+              </a:rPr>
+              <a:t>•  Revisa violaciones de esquema, 500s y respuestas fuera de contrato.</a:t>
             </a:r>
           </a:p>
         </p:txBody>
@@ -3347,7 +3381,7 @@
                   <a:srgbClr val="0B3D2E"/>
                 </a:solidFill>
               </a:rPr>
-              <a:t>❓ Preguntas frecuentes</a:t>
+              <a:t>✍️ Ejercicios</a:t>
             </a:r>
           </a:p>
         </p:txBody>
@@ -3385,97 +3419,82 @@
                   <a:srgbClr val="22282E"/>
                 </a:solidFill>
               </a:rPr>
-              <a:t>•  ❓ ¿Por qué el Top 10 de APIs es distinto del web clásico?</a:t>
-            </a:r>
-          </a:p>
-          <a:p>
-            <a:pPr>
-              <a:spcAft>
-                <a:spcPts val="600"/>
-              </a:spcAft>
-            </a:pPr>
-            <a:r>
-              <a:rPr sz="1500">
-                <a:solidFill>
-                  <a:srgbClr val="22282E"/>
-                </a:solidFill>
-              </a:rPr>
-              <a:t>•  Las APIs exponen lógica y objetos directamente y suelen delegar la UI al cliente; por eso los fallos de autorización (BOLA/BFLA) y de consumo de recursos dominan, más que XSS clásico.</a:t>
-            </a:r>
-          </a:p>
-          <a:p>
-            <a:pPr>
-              <a:spcAft>
-                <a:spcPts val="600"/>
-              </a:spcAft>
-            </a:pPr>
-            <a:r>
-              <a:rPr sz="1500">
-                <a:solidFill>
-                  <a:srgbClr val="22282E"/>
-                </a:solidFill>
-              </a:rPr>
-              <a:t>•  ❓ ¿Un WAF me protege de BOLA?</a:t>
-            </a:r>
-          </a:p>
-          <a:p>
-            <a:pPr>
-              <a:spcAft>
-                <a:spcPts val="600"/>
-              </a:spcAft>
-            </a:pPr>
-            <a:r>
-              <a:rPr sz="1500">
-                <a:solidFill>
-                  <a:srgbClr val="22282E"/>
-                </a:solidFill>
-              </a:rPr>
-              <a:t>•  Casi nunca. BOLA es un fallo de lógica de autorización: el request es "válido" técnicamente. Se corrige en el código verificando la propiedad del objeto, no con firmas genéricas.</a:t>
-            </a:r>
-          </a:p>
-          <a:p>
-            <a:pPr>
-              <a:spcAft>
-                <a:spcPts val="600"/>
-              </a:spcAft>
-            </a:pPr>
-            <a:r>
-              <a:rPr sz="1500">
-                <a:solidFill>
-                  <a:srgbClr val="22282E"/>
-                </a:solidFill>
-              </a:rPr>
-              <a:t>•  ❓ ¿El contrato OpenAPI mejora la seguridad o solo la documentación?</a:t>
-            </a:r>
-          </a:p>
-          <a:p>
-            <a:pPr>
-              <a:spcAft>
-                <a:spcPts val="600"/>
-              </a:spcAft>
-            </a:pPr>
-            <a:r>
-              <a:rPr sz="1500">
-                <a:solidFill>
-                  <a:srgbClr val="22282E"/>
-                </a:solidFill>
-              </a:rPr>
-              <a:t>•  Ambas. Como fuente de verdad permite validar entradas, generar tests/fuzzing y detectar respuestas fuera de contrato automáticamente.</a:t>
-            </a:r>
-          </a:p>
-          <a:p>
-            <a:pPr>
-              <a:spcAft>
-                <a:spcPts val="600"/>
-              </a:spcAft>
-            </a:pPr>
-            <a:r>
-              <a:rPr sz="1500">
-                <a:solidFill>
-                  <a:srgbClr val="22282E"/>
-                </a:solidFill>
-              </a:rPr>
-              <a:t>•  ❓ ¿Fuzzing de contrato reemplaza al pentest de API?</a:t>
+              <a:t>•  Identifica un BOLA en una API de práctica y describe cómo corregirlo.</a:t>
+            </a:r>
+          </a:p>
+          <a:p>
+            <a:pPr>
+              <a:spcAft>
+                <a:spcPts val="600"/>
+              </a:spcAft>
+            </a:pPr>
+            <a:r>
+              <a:rPr sz="1500">
+                <a:solidFill>
+                  <a:srgbClr val="22282E"/>
+                </a:solidFill>
+              </a:rPr>
+              <a:t>•  Diseña un contrato OpenAPI con auth por JWT y scopes por endpoint.</a:t>
+            </a:r>
+          </a:p>
+          <a:p>
+            <a:pPr>
+              <a:spcAft>
+                <a:spcPts val="600"/>
+              </a:spcAft>
+            </a:pPr>
+            <a:r>
+              <a:rPr sz="1500">
+                <a:solidFill>
+                  <a:srgbClr val="22282E"/>
+                </a:solidFill>
+              </a:rPr>
+              <a:t>•  Cierra un mass assignment con additionalProperties: false y allowlist.</a:t>
+            </a:r>
+          </a:p>
+          <a:p>
+            <a:pPr>
+              <a:spcAft>
+                <a:spcPts val="600"/>
+              </a:spcAft>
+            </a:pPr>
+            <a:r>
+              <a:rPr sz="1500">
+                <a:solidFill>
+                  <a:srgbClr val="22282E"/>
+                </a:solidFill>
+              </a:rPr>
+              <a:t>•  Ejecuta Schemathesis y clasifica los hallazgos por gravedad.</a:t>
+            </a:r>
+          </a:p>
+          <a:p>
+            <a:pPr>
+              <a:spcAft>
+                <a:spcPts val="600"/>
+              </a:spcAft>
+            </a:pPr>
+            <a:r>
+              <a:rPr sz="1500">
+                <a:solidFill>
+                  <a:srgbClr val="22282E"/>
+                </a:solidFill>
+              </a:rPr>
+              <a:t>•  Configura rate limiting y demuéstralo con una prueba de carga simple.</a:t>
+            </a:r>
+          </a:p>
+          <a:p>
+            <a:pPr>
+              <a:spcAft>
+                <a:spcPts val="600"/>
+              </a:spcAft>
+            </a:pPr>
+            <a:r>
+              <a:rPr sz="1500">
+                <a:solidFill>
+                  <a:srgbClr val="22282E"/>
+                </a:solidFill>
+              </a:rPr>
+              <a:t>•  Integra lint de contrato + fuzzing como gate de CI.</a:t>
             </a:r>
           </a:p>
         </p:txBody>
@@ -3526,7 +3545,7 @@
                   <a:srgbClr val="0B3D2E"/>
                 </a:solidFill>
               </a:rPr>
-              <a:t>🔗 Referencias</a:t>
+              <a:t>📝 Reto verificable</a:t>
             </a:r>
           </a:p>
         </p:txBody>
@@ -3564,6 +3583,483 @@
                   <a:srgbClr val="22282E"/>
                 </a:solidFill>
               </a:rPr>
+              <a:t>•  Asegura una API de extremo a extremo con controles y verificación automatizada.</a:t>
+            </a:r>
+          </a:p>
+          <a:p>
+            <a:pPr>
+              <a:spcAft>
+                <a:spcPts val="600"/>
+              </a:spcAft>
+            </a:pPr>
+            <a:r>
+              <a:rPr sz="1500">
+                <a:solidFill>
+                  <a:srgbClr val="22282E"/>
+                </a:solidFill>
+              </a:rPr>
+              <a:t>•  Criterio de aceptación: (a) el contrato OpenAPI define autenticación, autorización por</a:t>
+            </a:r>
+          </a:p>
+          <a:p>
+            <a:pPr>
+              <a:spcAft>
+                <a:spcPts val="600"/>
+              </a:spcAft>
+            </a:pPr>
+            <a:r>
+              <a:rPr sz="1500">
+                <a:solidFill>
+                  <a:srgbClr val="22282E"/>
+                </a:solidFill>
+              </a:rPr>
+              <a:t>•  endpoint y validación estricta de esquema; (b) los fallos BOLA y BFLA de la API de práctica</a:t>
+            </a:r>
+          </a:p>
+          <a:p>
+            <a:pPr>
+              <a:spcAft>
+                <a:spcPts val="600"/>
+              </a:spcAft>
+            </a:pPr>
+            <a:r>
+              <a:rPr sz="1500">
+                <a:solidFill>
+                  <a:srgbClr val="22282E"/>
+                </a:solidFill>
+              </a:rPr>
+              <a:t>•  están corregidos y verificados; (c) el pipeline lintea el contrato y ejecuta fuzzing basado en</a:t>
+            </a:r>
+          </a:p>
+          <a:p>
+            <a:pPr>
+              <a:spcAft>
+                <a:spcPts val="600"/>
+              </a:spcAft>
+            </a:pPr>
+            <a:r>
+              <a:rPr sz="1500">
+                <a:solidFill>
+                  <a:srgbClr val="22282E"/>
+                </a:solidFill>
+              </a:rPr>
+              <a:t>•  contrato que pasa; y (d) hay rate limiting activo demostrable.</a:t>
+            </a:r>
+          </a:p>
+        </p:txBody>
+      </p:sp>
+    </p:spTree>
+  </p:cSld>
+  <p:clrMapOvr>
+    <a:masterClrMapping/>
+  </p:clrMapOvr>
+</p:sld>
+</file>
+
+<file path=ppt/slides/slide13.xml><?xml version="1.0" encoding="utf-8"?>
+<p:sld xmlns:a="http://schemas.openxmlformats.org/drawingml/2006/main" xmlns:p="http://schemas.openxmlformats.org/presentationml/2006/main" xmlns:r="http://schemas.openxmlformats.org/officeDocument/2006/relationships">
+  <p:cSld>
+    <p:spTree>
+      <p:nvGrpSpPr>
+        <p:cNvPr id="1" name=""/>
+        <p:cNvGrpSpPr/>
+        <p:nvPr/>
+      </p:nvGrpSpPr>
+      <p:grpSpPr/>
+      <p:sp>
+        <p:nvSpPr>
+          <p:cNvPr id="2" name="TextBox 1"/>
+          <p:cNvSpPr txBox="1"/>
+          <p:nvPr/>
+        </p:nvSpPr>
+        <p:spPr>
+          <a:xfrm>
+            <a:off x="457200" y="320040"/>
+            <a:ext cx="8229600" cy="822960"/>
+          </a:xfrm>
+          <a:prstGeom prst="rect">
+            <a:avLst/>
+          </a:prstGeom>
+          <a:noFill/>
+        </p:spPr>
+        <p:txBody>
+          <a:bodyPr wrap="square">
+            <a:spAutoFit/>
+          </a:bodyPr>
+          <a:lstStyle/>
+          <a:p>
+            <a:r>
+              <a:rPr sz="2600" b="1">
+                <a:solidFill>
+                  <a:srgbClr val="0B3D2E"/>
+                </a:solidFill>
+              </a:rPr>
+              <a:t>⚠️ Errores comunes</a:t>
+            </a:r>
+          </a:p>
+        </p:txBody>
+      </p:sp>
+      <p:sp>
+        <p:nvSpPr>
+          <p:cNvPr id="3" name="TextBox 2"/>
+          <p:cNvSpPr txBox="1"/>
+          <p:nvPr/>
+        </p:nvSpPr>
+        <p:spPr>
+          <a:xfrm>
+            <a:off x="457200" y="1280160"/>
+            <a:ext cx="8229600" cy="4937760"/>
+          </a:xfrm>
+          <a:prstGeom prst="rect">
+            <a:avLst/>
+          </a:prstGeom>
+          <a:noFill/>
+        </p:spPr>
+        <p:txBody>
+          <a:bodyPr wrap="square">
+            <a:spAutoFit/>
+          </a:bodyPr>
+          <a:lstStyle/>
+          <a:p>
+            <a:pPr>
+              <a:spcAft>
+                <a:spcPts val="600"/>
+              </a:spcAft>
+            </a:pPr>
+            <a:r>
+              <a:rPr sz="1500">
+                <a:solidFill>
+                  <a:srgbClr val="22282E"/>
+                </a:solidFill>
+              </a:rPr>
+              <a:t>•  Cambiar un ID en la URL devuelve datos de otro usuario — BOLA: falta autorización por objeto. Verifica propiedad en cada request.</a:t>
+            </a:r>
+          </a:p>
+          <a:p>
+            <a:pPr>
+              <a:spcAft>
+                <a:spcPts val="600"/>
+              </a:spcAft>
+            </a:pPr>
+            <a:r>
+              <a:rPr sz="1500">
+                <a:solidFill>
+                  <a:srgbClr val="22282E"/>
+                </a:solidFill>
+              </a:rPr>
+              <a:t>•  Un usuario normal accede a endpoints de admin — BFLA: control por función ausente. Deny-by-default y checks por rol.</a:t>
+            </a:r>
+          </a:p>
+          <a:p>
+            <a:pPr>
+              <a:spcAft>
+                <a:spcPts val="600"/>
+              </a:spcAft>
+            </a:pPr>
+            <a:r>
+              <a:rPr sz="1500">
+                <a:solidFill>
+                  <a:srgbClr val="22282E"/>
+                </a:solidFill>
+              </a:rPr>
+              <a:t>•  El cliente envía isadmin: true y funciona — Mass assignment. Usa allowlist de campos y additionalProperties: false.</a:t>
+            </a:r>
+          </a:p>
+          <a:p>
+            <a:pPr>
+              <a:spcAft>
+                <a:spcPts val="600"/>
+              </a:spcAft>
+            </a:pPr>
+            <a:r>
+              <a:rPr sz="1500">
+                <a:solidFill>
+                  <a:srgbClr val="22282E"/>
+                </a:solidFill>
+              </a:rPr>
+              <a:t>•  La API devuelve todo el objeto de usuario — Exposición excesiva de datos. Serializa solo los campos necesarios.</a:t>
+            </a:r>
+          </a:p>
+          <a:p>
+            <a:pPr>
+              <a:spcAft>
+                <a:spcPts val="600"/>
+              </a:spcAft>
+            </a:pPr>
+            <a:r>
+              <a:rPr sz="1500">
+                <a:solidFill>
+                  <a:srgbClr val="22282E"/>
+                </a:solidFill>
+              </a:rPr>
+              <a:t>•  Fuerza bruta al login sin límite — Falta rate limiting (API4). Añade límites por IP/usuario y backoff.</a:t>
+            </a:r>
+          </a:p>
+        </p:txBody>
+      </p:sp>
+    </p:spTree>
+  </p:cSld>
+  <p:clrMapOvr>
+    <a:masterClrMapping/>
+  </p:clrMapOvr>
+</p:sld>
+</file>
+
+<file path=ppt/slides/slide14.xml><?xml version="1.0" encoding="utf-8"?>
+<p:sld xmlns:a="http://schemas.openxmlformats.org/drawingml/2006/main" xmlns:p="http://schemas.openxmlformats.org/presentationml/2006/main" xmlns:r="http://schemas.openxmlformats.org/officeDocument/2006/relationships">
+  <p:cSld>
+    <p:spTree>
+      <p:nvGrpSpPr>
+        <p:cNvPr id="1" name=""/>
+        <p:cNvGrpSpPr/>
+        <p:nvPr/>
+      </p:nvGrpSpPr>
+      <p:grpSpPr/>
+      <p:sp>
+        <p:nvSpPr>
+          <p:cNvPr id="2" name="TextBox 1"/>
+          <p:cNvSpPr txBox="1"/>
+          <p:nvPr/>
+        </p:nvSpPr>
+        <p:spPr>
+          <a:xfrm>
+            <a:off x="457200" y="320040"/>
+            <a:ext cx="8229600" cy="822960"/>
+          </a:xfrm>
+          <a:prstGeom prst="rect">
+            <a:avLst/>
+          </a:prstGeom>
+          <a:noFill/>
+        </p:spPr>
+        <p:txBody>
+          <a:bodyPr wrap="square">
+            <a:spAutoFit/>
+          </a:bodyPr>
+          <a:lstStyle/>
+          <a:p>
+            <a:r>
+              <a:rPr sz="2600" b="1">
+                <a:solidFill>
+                  <a:srgbClr val="0B3D2E"/>
+                </a:solidFill>
+              </a:rPr>
+              <a:t>❓ Preguntas frecuentes</a:t>
+            </a:r>
+          </a:p>
+        </p:txBody>
+      </p:sp>
+      <p:sp>
+        <p:nvSpPr>
+          <p:cNvPr id="3" name="TextBox 2"/>
+          <p:cNvSpPr txBox="1"/>
+          <p:nvPr/>
+        </p:nvSpPr>
+        <p:spPr>
+          <a:xfrm>
+            <a:off x="457200" y="1280160"/>
+            <a:ext cx="8229600" cy="4937760"/>
+          </a:xfrm>
+          <a:prstGeom prst="rect">
+            <a:avLst/>
+          </a:prstGeom>
+          <a:noFill/>
+        </p:spPr>
+        <p:txBody>
+          <a:bodyPr wrap="square">
+            <a:spAutoFit/>
+          </a:bodyPr>
+          <a:lstStyle/>
+          <a:p>
+            <a:pPr>
+              <a:spcAft>
+                <a:spcPts val="600"/>
+              </a:spcAft>
+            </a:pPr>
+            <a:r>
+              <a:rPr sz="1500">
+                <a:solidFill>
+                  <a:srgbClr val="22282E"/>
+                </a:solidFill>
+              </a:rPr>
+              <a:t>•  ❓ ¿Por qué el Top 10 de APIs es distinto del web clásico?</a:t>
+            </a:r>
+          </a:p>
+          <a:p>
+            <a:pPr>
+              <a:spcAft>
+                <a:spcPts val="600"/>
+              </a:spcAft>
+            </a:pPr>
+            <a:r>
+              <a:rPr sz="1500">
+                <a:solidFill>
+                  <a:srgbClr val="22282E"/>
+                </a:solidFill>
+              </a:rPr>
+              <a:t>•  Las APIs exponen lógica y objetos directamente y suelen delegar la UI al cliente; por eso los fallos de autorización (BOLA/BFLA) y de consumo de recursos dominan, más que XSS clásico.</a:t>
+            </a:r>
+          </a:p>
+          <a:p>
+            <a:pPr>
+              <a:spcAft>
+                <a:spcPts val="600"/>
+              </a:spcAft>
+            </a:pPr>
+            <a:r>
+              <a:rPr sz="1500">
+                <a:solidFill>
+                  <a:srgbClr val="22282E"/>
+                </a:solidFill>
+              </a:rPr>
+              <a:t>•  ❓ ¿Un WAF me protege de BOLA?</a:t>
+            </a:r>
+          </a:p>
+          <a:p>
+            <a:pPr>
+              <a:spcAft>
+                <a:spcPts val="600"/>
+              </a:spcAft>
+            </a:pPr>
+            <a:r>
+              <a:rPr sz="1500">
+                <a:solidFill>
+                  <a:srgbClr val="22282E"/>
+                </a:solidFill>
+              </a:rPr>
+              <a:t>•  Casi nunca. BOLA es un fallo de lógica de autorización: el request es "válido" técnicamente. Se corrige en el código verificando la propiedad del objeto, no con firmas genéricas.</a:t>
+            </a:r>
+          </a:p>
+          <a:p>
+            <a:pPr>
+              <a:spcAft>
+                <a:spcPts val="600"/>
+              </a:spcAft>
+            </a:pPr>
+            <a:r>
+              <a:rPr sz="1500">
+                <a:solidFill>
+                  <a:srgbClr val="22282E"/>
+                </a:solidFill>
+              </a:rPr>
+              <a:t>•  ❓ ¿El contrato OpenAPI mejora la seguridad o solo la documentación?</a:t>
+            </a:r>
+          </a:p>
+          <a:p>
+            <a:pPr>
+              <a:spcAft>
+                <a:spcPts val="600"/>
+              </a:spcAft>
+            </a:pPr>
+            <a:r>
+              <a:rPr sz="1500">
+                <a:solidFill>
+                  <a:srgbClr val="22282E"/>
+                </a:solidFill>
+              </a:rPr>
+              <a:t>•  Ambas. Como fuente de verdad permite validar entradas, generar tests/fuzzing y detectar respuestas fuera de contrato automáticamente.</a:t>
+            </a:r>
+          </a:p>
+          <a:p>
+            <a:pPr>
+              <a:spcAft>
+                <a:spcPts val="600"/>
+              </a:spcAft>
+            </a:pPr>
+            <a:r>
+              <a:rPr sz="1500">
+                <a:solidFill>
+                  <a:srgbClr val="22282E"/>
+                </a:solidFill>
+              </a:rPr>
+              <a:t>•  ❓ ¿Fuzzing de contrato reemplaza al pentest de API?</a:t>
+            </a:r>
+          </a:p>
+        </p:txBody>
+      </p:sp>
+    </p:spTree>
+  </p:cSld>
+  <p:clrMapOvr>
+    <a:masterClrMapping/>
+  </p:clrMapOvr>
+</p:sld>
+</file>
+
+<file path=ppt/slides/slide15.xml><?xml version="1.0" encoding="utf-8"?>
+<p:sld xmlns:a="http://schemas.openxmlformats.org/drawingml/2006/main" xmlns:p="http://schemas.openxmlformats.org/presentationml/2006/main" xmlns:r="http://schemas.openxmlformats.org/officeDocument/2006/relationships">
+  <p:cSld>
+    <p:spTree>
+      <p:nvGrpSpPr>
+        <p:cNvPr id="1" name=""/>
+        <p:cNvGrpSpPr/>
+        <p:nvPr/>
+      </p:nvGrpSpPr>
+      <p:grpSpPr/>
+      <p:sp>
+        <p:nvSpPr>
+          <p:cNvPr id="2" name="TextBox 1"/>
+          <p:cNvSpPr txBox="1"/>
+          <p:nvPr/>
+        </p:nvSpPr>
+        <p:spPr>
+          <a:xfrm>
+            <a:off x="457200" y="320040"/>
+            <a:ext cx="8229600" cy="822960"/>
+          </a:xfrm>
+          <a:prstGeom prst="rect">
+            <a:avLst/>
+          </a:prstGeom>
+          <a:noFill/>
+        </p:spPr>
+        <p:txBody>
+          <a:bodyPr wrap="square">
+            <a:spAutoFit/>
+          </a:bodyPr>
+          <a:lstStyle/>
+          <a:p>
+            <a:r>
+              <a:rPr sz="2600" b="1">
+                <a:solidFill>
+                  <a:srgbClr val="0B3D2E"/>
+                </a:solidFill>
+              </a:rPr>
+              <a:t>🔗 Referencias</a:t>
+            </a:r>
+          </a:p>
+        </p:txBody>
+      </p:sp>
+      <p:sp>
+        <p:nvSpPr>
+          <p:cNvPr id="3" name="TextBox 2"/>
+          <p:cNvSpPr txBox="1"/>
+          <p:nvPr/>
+        </p:nvSpPr>
+        <p:spPr>
+          <a:xfrm>
+            <a:off x="457200" y="1280160"/>
+            <a:ext cx="8229600" cy="4937760"/>
+          </a:xfrm>
+          <a:prstGeom prst="rect">
+            <a:avLst/>
+          </a:prstGeom>
+          <a:noFill/>
+        </p:spPr>
+        <p:txBody>
+          <a:bodyPr wrap="square">
+            <a:spAutoFit/>
+          </a:bodyPr>
+          <a:lstStyle/>
+          <a:p>
+            <a:pPr>
+              <a:spcAft>
+                <a:spcPts val="600"/>
+              </a:spcAft>
+            </a:pPr>
+            <a:r>
+              <a:rPr sz="1500">
+                <a:solidFill>
+                  <a:srgbClr val="22282E"/>
+                </a:solidFill>
+              </a:rPr>
               <a:t>•  OWASP API Security Top 10 (2023) — &lt;https://owasp.org/API-Security/editions/2023/en/0x11-t10/&gt;</a:t>
             </a:r>
           </a:p>
@@ -3629,6 +4125,81 @@
           </a:p>
         </p:txBody>
       </p:sp>
+    </p:spTree>
+  </p:cSld>
+  <p:clrMapOvr>
+    <a:masterClrMapping/>
+  </p:clrMapOvr>
+</p:sld>
+</file>
+
+<file path=ppt/slides/slide16.xml><?xml version="1.0" encoding="utf-8"?>
+<p:sld xmlns:a="http://schemas.openxmlformats.org/drawingml/2006/main" xmlns:p="http://schemas.openxmlformats.org/presentationml/2006/main" xmlns:r="http://schemas.openxmlformats.org/officeDocument/2006/relationships">
+  <p:cSld>
+    <p:spTree>
+      <p:nvGrpSpPr>
+        <p:cNvPr id="1" name=""/>
+        <p:cNvGrpSpPr/>
+        <p:nvPr/>
+      </p:nvGrpSpPr>
+      <p:grpSpPr/>
+      <p:sp>
+        <p:nvSpPr>
+          <p:cNvPr id="2" name="TextBox 1"/>
+          <p:cNvSpPr txBox="1"/>
+          <p:nvPr/>
+        </p:nvSpPr>
+        <p:spPr>
+          <a:xfrm>
+            <a:off x="457200" y="274320"/>
+            <a:ext cx="8229600" cy="640080"/>
+          </a:xfrm>
+          <a:prstGeom prst="rect">
+            <a:avLst/>
+          </a:prstGeom>
+          <a:noFill/>
+        </p:spPr>
+        <p:txBody>
+          <a:bodyPr wrap="square">
+            <a:spAutoFit/>
+          </a:bodyPr>
+          <a:lstStyle/>
+          <a:p>
+            <a:r>
+              <a:rPr sz="2200" b="1">
+                <a:solidFill>
+                  <a:srgbClr val="0B3D2E"/>
+                </a:solidFill>
+              </a:rPr>
+              <a:t>Diagrama de la clase</a:t>
+            </a:r>
+          </a:p>
+        </p:txBody>
+      </p:sp>
+      <p:pic>
+        <p:nvPicPr>
+          <p:cNvPr id="3" name="Picture 2" descr="27fcd65f332ea07d.png"/>
+          <p:cNvPicPr>
+            <a:picLocks noChangeAspect="1"/>
+          </p:cNvPicPr>
+          <p:nvPr/>
+        </p:nvPicPr>
+        <p:blipFill>
+          <a:blip r:embed="rId2"/>
+          <a:stretch>
+            <a:fillRect/>
+          </a:stretch>
+        </p:blipFill>
+        <p:spPr>
+          <a:xfrm>
+            <a:off x="457200" y="3387852"/>
+            <a:ext cx="8229600" cy="722376"/>
+          </a:xfrm>
+          <a:prstGeom prst="rect">
+            <a:avLst/>
+          </a:prstGeom>
+        </p:spPr>
+      </p:pic>
     </p:spTree>
   </p:cSld>
   <p:clrMapOvr>
@@ -4167,7 +4738,7 @@
                   <a:srgbClr val="0B3D2E"/>
                 </a:solidFill>
               </a:rPr>
-              <a:t>📖 Definiciones y características</a:t>
+              <a:t>🧠 Explicación en profundidad</a:t>
             </a:r>
           </a:p>
         </p:txBody>
@@ -4205,82 +4776,82 @@
                   <a:srgbClr val="22282E"/>
                 </a:solidFill>
               </a:rPr>
-              <a:t>•  BOLA (Broken Object Level Authorization): acceder a objetos de otros usuarios cambiando un ID. Característica: API1, la vulnerabilidad más común; se previene autorizando por objeto en cada request.</a:t>
-            </a:r>
-          </a:p>
-          <a:p>
-            <a:pPr>
-              <a:spcAft>
-                <a:spcPts val="600"/>
-              </a:spcAft>
-            </a:pPr>
-            <a:r>
-              <a:rPr sz="1500">
-                <a:solidFill>
-                  <a:srgbClr val="22282E"/>
-                </a:solidFill>
-              </a:rPr>
-              <a:t>•  BFLA (Broken Function Level Authorization): invocar funciones/roles no permitidos (p. ej. endpoints de admin). Característica: API5; se previene con control de acceso por función y deny-by-default.</a:t>
-            </a:r>
-          </a:p>
-          <a:p>
-            <a:pPr>
-              <a:spcAft>
-                <a:spcPts val="600"/>
-              </a:spcAft>
-            </a:pPr>
-            <a:r>
-              <a:rPr sz="1500">
-                <a:solidFill>
-                  <a:srgbClr val="22282E"/>
-                </a:solidFill>
-              </a:rPr>
-              <a:t>•  Contrato OpenAPI: especificación formal de la API. Característica: fuente de verdad para validar requests/responses y generar tests.</a:t>
-            </a:r>
-          </a:p>
-          <a:p>
-            <a:pPr>
-              <a:spcAft>
-                <a:spcPts val="600"/>
-              </a:spcAft>
-            </a:pPr>
-            <a:r>
-              <a:rPr sz="1500">
-                <a:solidFill>
-                  <a:srgbClr val="22282E"/>
-                </a:solidFill>
-              </a:rPr>
-              <a:t>•  Validación de esquema: rechazar payloads que no cumplen el contrato. Característica: reduce inyecciones y mass assignment.</a:t>
-            </a:r>
-          </a:p>
-          <a:p>
-            <a:pPr>
-              <a:spcAft>
-                <a:spcPts val="600"/>
-              </a:spcAft>
-            </a:pPr>
-            <a:r>
-              <a:rPr sz="1500">
-                <a:solidFill>
-                  <a:srgbClr val="22282E"/>
-                </a:solidFill>
-              </a:rPr>
-              <a:t>•  Mass assignment (API6): vincular campos del payload a propiedades internas sin filtrar. Característica: se previene con allowlist de campos.</a:t>
-            </a:r>
-          </a:p>
-          <a:p>
-            <a:pPr>
-              <a:spcAft>
-                <a:spcPts val="600"/>
-              </a:spcAft>
-            </a:pPr>
-            <a:r>
-              <a:rPr sz="1500">
-                <a:solidFill>
-                  <a:srgbClr val="22282E"/>
-                </a:solidFill>
-              </a:rPr>
-              <a:t>•  Rate limiting: limitar peticiones por cliente/tiempo. Característica: mitiga abuso, fuerza bruta y DoS (API4).</a:t>
+              <a:t>•  Una API segura comienza definiendo activos, consumidores, operaciones y propiedades de autorización. OpenAPI puede especificar rutas, esquemas y mecanismos de autenticación, pero no demuestra que el…</a:t>
+            </a:r>
+          </a:p>
+          <a:p>
+            <a:pPr>
+              <a:spcAft>
+                <a:spcPts val="600"/>
+              </a:spcAft>
+            </a:pPr>
+            <a:r>
+              <a:rPr sz="1500">
+                <a:solidFill>
+                  <a:srgbClr val="22282E"/>
+                </a:solidFill>
+              </a:rPr>
+              <a:t>•  El contrato permite linting, generación de casos y detección de cambios incompatibles. Los esquemas restringen forma, tamaño y tipo; las validaciones semánticas comprueban reglas como fechas o…</a:t>
+            </a:r>
+          </a:p>
+          <a:p>
+            <a:pPr>
+              <a:spcAft>
+                <a:spcPts val="600"/>
+              </a:spcAft>
+            </a:pPr>
+            <a:r>
+              <a:rPr sz="1500">
+                <a:solidFill>
+                  <a:srgbClr val="22282E"/>
+                </a:solidFill>
+              </a:rPr>
+              <a:t>•  La suite combina casos válidos con abuso: identificadores de otro usuario, rol insuficiente, campos adicionales, listas masivas, reintentos, estados inválidos y funciones administrativas. Para BOLA…</a:t>
+            </a:r>
+          </a:p>
+          <a:p>
+            <a:pPr>
+              <a:spcAft>
+                <a:spcPts val="600"/>
+              </a:spcAft>
+            </a:pPr>
+            <a:r>
+              <a:rPr sz="1500">
+                <a:solidFill>
+                  <a:srgbClr val="22282E"/>
+                </a:solidFill>
+              </a:rPr>
+              <a:t>•  El fuzzing guiado por esquema explora combinaciones que el equipo no escribió, pero su calidad depende del contrato y del oráculo. Una respuesta 500 es un indicio; se investiga el efecto y la…</a:t>
+            </a:r>
+          </a:p>
+          <a:p>
+            <a:pPr>
+              <a:spcAft>
+                <a:spcPts val="600"/>
+              </a:spcAft>
+            </a:pPr>
+            <a:r>
+              <a:rPr sz="1500">
+                <a:solidFill>
+                  <a:srgbClr val="22282E"/>
+                </a:solidFill>
+              </a:rPr>
+              <a:t>•  Una política de versión protege consumidores, pero mantener una versión vulnerable indefinidamente tampoco es seguro. Se identifican clientes, se publica deprecación, se mide uso y se retira con…</a:t>
+            </a:r>
+          </a:p>
+          <a:p>
+            <a:pPr>
+              <a:spcAft>
+                <a:spcPts val="600"/>
+              </a:spcAft>
+            </a:pPr>
+            <a:r>
+              <a:rPr sz="1500">
+                <a:solidFill>
+                  <a:srgbClr val="22282E"/>
+                </a:solidFill>
+              </a:rPr>
+              <a:t>•  La UI oculta «exportar todos» a usuarios normales, pero la API acepta la operación si se conoce la ruta. El contrato documenta el endpoint sin su requisito de rol y las pruebas solo usan…</a:t>
             </a:r>
           </a:p>
         </p:txBody>
@@ -4331,7 +4902,7 @@
                   <a:srgbClr val="0B3D2E"/>
                 </a:solidFill>
               </a:rPr>
-              <a:t>🧰 Herramientas y preparación</a:t>
+              <a:t>📔 Glosario operativo</a:t>
             </a:r>
           </a:p>
         </p:txBody>
@@ -4369,82 +4940,82 @@
                   <a:srgbClr val="22282E"/>
                 </a:solidFill>
               </a:rPr>
-              <a:t>•  OpenAPI (Swagger) para el contrato; Spectral para lintarlo.</a:t>
-            </a:r>
-          </a:p>
-          <a:p>
-            <a:pPr>
-              <a:spcAft>
-                <a:spcPts val="600"/>
-              </a:spcAft>
-            </a:pPr>
-            <a:r>
-              <a:rPr sz="1500">
-                <a:solidFill>
-                  <a:srgbClr val="22282E"/>
-                </a:solidFill>
-              </a:rPr>
-              <a:t>•  Schemathesis o RESTler para fuzzing basado en contrato.</a:t>
-            </a:r>
-          </a:p>
-          <a:p>
-            <a:pPr>
-              <a:spcAft>
-                <a:spcPts val="600"/>
-              </a:spcAft>
-            </a:pPr>
-            <a:r>
-              <a:rPr sz="1500">
-                <a:solidFill>
-                  <a:srgbClr val="22282E"/>
-                </a:solidFill>
-              </a:rPr>
-              <a:t>•  OWASP ZAP con importación de OpenAPI para escaneo dirigido.</a:t>
-            </a:r>
-          </a:p>
-          <a:p>
-            <a:pPr>
-              <a:spcAft>
-                <a:spcPts val="600"/>
-              </a:spcAft>
-            </a:pPr>
-            <a:r>
-              <a:rPr sz="1500">
-                <a:solidFill>
-                  <a:srgbClr val="22282E"/>
-                </a:solidFill>
-              </a:rPr>
-              <a:t>•  Una API de práctica propia (p. ej. crAPI o VAmPI, APIs vulnerables de laboratorio).</a:t>
-            </a:r>
-          </a:p>
-          <a:p>
-            <a:pPr>
-              <a:spcAft>
-                <a:spcPts val="600"/>
-              </a:spcAft>
-            </a:pPr>
-            <a:r>
-              <a:rPr sz="1500">
-                <a:solidFill>
-                  <a:srgbClr val="22282E"/>
-                </a:solidFill>
-              </a:rPr>
-              <a:t>•  pip install schemathesis</a:t>
-            </a:r>
-          </a:p>
-          <a:p>
-            <a:pPr>
-              <a:spcAft>
-                <a:spcPts val="600"/>
-              </a:spcAft>
-            </a:pPr>
-            <a:r>
-              <a:rPr sz="1500">
-                <a:solidFill>
-                  <a:srgbClr val="22282E"/>
-                </a:solidFill>
-              </a:rPr>
-              <a:t>•  schemathesis run http://localhost:8000/openapi.json --checks all</a:t>
+              <a:t>•  Término — Definición útil</a:t>
+            </a:r>
+          </a:p>
+          <a:p>
+            <a:pPr>
+              <a:spcAft>
+                <a:spcPts val="600"/>
+              </a:spcAft>
+            </a:pPr>
+            <a:r>
+              <a:rPr sz="1500">
+                <a:solidFill>
+                  <a:srgbClr val="22282E"/>
+                </a:solidFill>
+              </a:rPr>
+              <a:t>•  Contrato — Descripción interoperable de operaciones y mensajes; no prueba autorización.</a:t>
+            </a:r>
+          </a:p>
+          <a:p>
+            <a:pPr>
+              <a:spcAft>
+                <a:spcPts val="600"/>
+              </a:spcAft>
+            </a:pPr>
+            <a:r>
+              <a:rPr sz="1500">
+                <a:solidFill>
+                  <a:srgbClr val="22282E"/>
+                </a:solidFill>
+              </a:rPr>
+              <a:t>•  BOLA — Acceso indebido a objetos por faltar una comprobación contextual.</a:t>
+            </a:r>
+          </a:p>
+          <a:p>
+            <a:pPr>
+              <a:spcAft>
+                <a:spcPts val="600"/>
+              </a:spcAft>
+            </a:pPr>
+            <a:r>
+              <a:rPr sz="1500">
+                <a:solidFill>
+                  <a:srgbClr val="22282E"/>
+                </a:solidFill>
+              </a:rPr>
+              <a:t>•  Mass assignment — Modificación de campos internos al enlazar entrada sin lista permitida.</a:t>
+            </a:r>
+          </a:p>
+          <a:p>
+            <a:pPr>
+              <a:spcAft>
+                <a:spcPts val="600"/>
+              </a:spcAft>
+            </a:pPr>
+            <a:r>
+              <a:rPr sz="1500">
+                <a:solidFill>
+                  <a:srgbClr val="22282E"/>
+                </a:solidFill>
+              </a:rPr>
+              <a:t>•  Rate limit — Restricción de frecuencia; debe considerar identidad, operación y coste.</a:t>
+            </a:r>
+          </a:p>
+          <a:p>
+            <a:pPr>
+              <a:spcAft>
+                <a:spcPts val="600"/>
+              </a:spcAft>
+            </a:pPr>
+            <a:r>
+              <a:rPr sz="1500">
+                <a:solidFill>
+                  <a:srgbClr val="22282E"/>
+                </a:solidFill>
+              </a:rPr>
+              <a:t>•  Prueba negativa — Caso que exige rechazar una acción inválida o no autorizada.</a:t>
             </a:r>
           </a:p>
         </p:txBody>
@@ -4495,7 +5066,7 @@
                   <a:srgbClr val="0B3D2E"/>
                 </a:solidFill>
               </a:rPr>
-              <a:t>🧪 Laboratorio guiado</a:t>
+              <a:t>✅ Criterio de dominio</a:t>
             </a:r>
           </a:p>
         </p:txBody>
@@ -4533,97 +5104,7 @@
                   <a:srgbClr val="22282E"/>
                 </a:solidFill>
               </a:rPr>
-              <a:t>•  Levanta una API vulnerable de práctica (crAPI o VAmPI) en local.</a:t>
-            </a:r>
-          </a:p>
-          <a:p>
-            <a:pPr>
-              <a:spcAft>
-                <a:spcPts val="600"/>
-              </a:spcAft>
-            </a:pPr>
-            <a:r>
-              <a:rPr sz="1500">
-                <a:solidFill>
-                  <a:srgbClr val="22282E"/>
-                </a:solidFill>
-              </a:rPr>
-              <a:t>•  Explora BOLA. Autentícate como usuario A, pide tu recurso (GET /users/{idA}/profile), luego cambia el id por el de otro usuario. Si respondes con datos ajenos, es BOLA. Documenta la causa: falta de check de propiedad.</a:t>
-            </a:r>
-          </a:p>
-          <a:p>
-            <a:pPr>
-              <a:spcAft>
-                <a:spcPts val="600"/>
-              </a:spcAft>
-            </a:pPr>
-            <a:r>
-              <a:rPr sz="1500">
-                <a:solidFill>
-                  <a:srgbClr val="22282E"/>
-                </a:solidFill>
-              </a:rPr>
-              <a:t>•  Explora BFLA. Como usuario normal, intenta llamar un endpoint de admin (POST /admin/...). Si funciona, es BFLA.</a:t>
-            </a:r>
-          </a:p>
-          <a:p>
-            <a:pPr>
-              <a:spcAft>
-                <a:spcPts val="600"/>
-              </a:spcAft>
-            </a:pPr>
-            <a:r>
-              <a:rPr sz="1500">
-                <a:solidFill>
-                  <a:srgbClr val="22282E"/>
-                </a:solidFill>
-              </a:rPr>
-              <a:t>•  Diseña el contrato seguro. Escribe/ajusta el OpenAPI: define securitySchemes (bearer JWT), scopes por endpoint, esquemas de request con required y additionalProperties: false para evitar mass assignment.</a:t>
-            </a:r>
-          </a:p>
-          <a:p>
-            <a:pPr>
-              <a:spcAft>
-                <a:spcPts val="600"/>
-              </a:spcAft>
-            </a:pPr>
-            <a:r>
-              <a:rPr sz="1500">
-                <a:solidFill>
-                  <a:srgbClr val="22282E"/>
-                </a:solidFill>
-              </a:rPr>
-              <a:t>•  Lintéalo con Spectral:</a:t>
-            </a:r>
-          </a:p>
-          <a:p>
-            <a:pPr>
-              <a:spcAft>
-                <a:spcPts val="600"/>
-              </a:spcAft>
-            </a:pPr>
-            <a:r>
-              <a:rPr sz="1500">
-                <a:solidFill>
-                  <a:srgbClr val="22282E"/>
-                </a:solidFill>
-              </a:rPr>
-              <a:t>•  spectral lint openapi.yaml</a:t>
-            </a:r>
-          </a:p>
-          <a:p>
-            <a:pPr>
-              <a:spcAft>
-                <a:spcPts val="600"/>
-              </a:spcAft>
-            </a:pPr>
-            <a:r>
-              <a:rPr sz="1500">
-                <a:solidFill>
-                  <a:srgbClr val="22282E"/>
-                </a:solidFill>
-              </a:rPr>
-              <a:t>•  Fuzzing basado en contrato:</a:t>
+              <a:t>•  El alumno domina la clase si transforma propiedades de negocio en contrato, implementación y pruebas negativas; diferencia gateway de autorización de dominio; controla recursos; y conserva evidencia…</a:t>
             </a:r>
           </a:p>
         </p:txBody>
@@ -4674,7 +5155,7 @@
                   <a:srgbClr val="0B3D2E"/>
                 </a:solidFill>
               </a:rPr>
-              <a:t>✍️ Ejercicios</a:t>
+              <a:t>📖 Definiciones y características</a:t>
             </a:r>
           </a:p>
         </p:txBody>
@@ -4712,82 +5193,82 @@
                   <a:srgbClr val="22282E"/>
                 </a:solidFill>
               </a:rPr>
-              <a:t>•  Identifica un BOLA en una API de práctica y describe cómo corregirlo.</a:t>
-            </a:r>
-          </a:p>
-          <a:p>
-            <a:pPr>
-              <a:spcAft>
-                <a:spcPts val="600"/>
-              </a:spcAft>
-            </a:pPr>
-            <a:r>
-              <a:rPr sz="1500">
-                <a:solidFill>
-                  <a:srgbClr val="22282E"/>
-                </a:solidFill>
-              </a:rPr>
-              <a:t>•  Diseña un contrato OpenAPI con auth por JWT y scopes por endpoint.</a:t>
-            </a:r>
-          </a:p>
-          <a:p>
-            <a:pPr>
-              <a:spcAft>
-                <a:spcPts val="600"/>
-              </a:spcAft>
-            </a:pPr>
-            <a:r>
-              <a:rPr sz="1500">
-                <a:solidFill>
-                  <a:srgbClr val="22282E"/>
-                </a:solidFill>
-              </a:rPr>
-              <a:t>•  Cierra un mass assignment con additionalProperties: false y allowlist.</a:t>
-            </a:r>
-          </a:p>
-          <a:p>
-            <a:pPr>
-              <a:spcAft>
-                <a:spcPts val="600"/>
-              </a:spcAft>
-            </a:pPr>
-            <a:r>
-              <a:rPr sz="1500">
-                <a:solidFill>
-                  <a:srgbClr val="22282E"/>
-                </a:solidFill>
-              </a:rPr>
-              <a:t>•  Ejecuta Schemathesis y clasifica los hallazgos por gravedad.</a:t>
-            </a:r>
-          </a:p>
-          <a:p>
-            <a:pPr>
-              <a:spcAft>
-                <a:spcPts val="600"/>
-              </a:spcAft>
-            </a:pPr>
-            <a:r>
-              <a:rPr sz="1500">
-                <a:solidFill>
-                  <a:srgbClr val="22282E"/>
-                </a:solidFill>
-              </a:rPr>
-              <a:t>•  Configura rate limiting y demuéstralo con una prueba de carga simple.</a:t>
-            </a:r>
-          </a:p>
-          <a:p>
-            <a:pPr>
-              <a:spcAft>
-                <a:spcPts val="600"/>
-              </a:spcAft>
-            </a:pPr>
-            <a:r>
-              <a:rPr sz="1500">
-                <a:solidFill>
-                  <a:srgbClr val="22282E"/>
-                </a:solidFill>
-              </a:rPr>
-              <a:t>•  Integra lint de contrato + fuzzing como gate de CI.</a:t>
+              <a:t>•  BOLA (Broken Object Level Authorization): acceder a objetos de otros usuarios cambiando un ID. Característica: API1, la vulnerabilidad más común; se previene autorizando por objeto en cada request.</a:t>
+            </a:r>
+          </a:p>
+          <a:p>
+            <a:pPr>
+              <a:spcAft>
+                <a:spcPts val="600"/>
+              </a:spcAft>
+            </a:pPr>
+            <a:r>
+              <a:rPr sz="1500">
+                <a:solidFill>
+                  <a:srgbClr val="22282E"/>
+                </a:solidFill>
+              </a:rPr>
+              <a:t>•  BFLA (Broken Function Level Authorization): invocar funciones/roles no permitidos (p. ej. endpoints de admin). Característica: API5; se previene con control de acceso por función y deny-by-default.</a:t>
+            </a:r>
+          </a:p>
+          <a:p>
+            <a:pPr>
+              <a:spcAft>
+                <a:spcPts val="600"/>
+              </a:spcAft>
+            </a:pPr>
+            <a:r>
+              <a:rPr sz="1500">
+                <a:solidFill>
+                  <a:srgbClr val="22282E"/>
+                </a:solidFill>
+              </a:rPr>
+              <a:t>•  Contrato OpenAPI: especificación formal de la API. Característica: fuente de verdad para validar requests/responses y generar tests.</a:t>
+            </a:r>
+          </a:p>
+          <a:p>
+            <a:pPr>
+              <a:spcAft>
+                <a:spcPts val="600"/>
+              </a:spcAft>
+            </a:pPr>
+            <a:r>
+              <a:rPr sz="1500">
+                <a:solidFill>
+                  <a:srgbClr val="22282E"/>
+                </a:solidFill>
+              </a:rPr>
+              <a:t>•  Validación de esquema: rechazar payloads que no cumplen el contrato. Característica: reduce inyecciones y mass assignment.</a:t>
+            </a:r>
+          </a:p>
+          <a:p>
+            <a:pPr>
+              <a:spcAft>
+                <a:spcPts val="600"/>
+              </a:spcAft>
+            </a:pPr>
+            <a:r>
+              <a:rPr sz="1500">
+                <a:solidFill>
+                  <a:srgbClr val="22282E"/>
+                </a:solidFill>
+              </a:rPr>
+              <a:t>•  Mass assignment (API6): vincular campos del payload a propiedades internas sin filtrar. Característica: se previene con allowlist de campos.</a:t>
+            </a:r>
+          </a:p>
+          <a:p>
+            <a:pPr>
+              <a:spcAft>
+                <a:spcPts val="600"/>
+              </a:spcAft>
+            </a:pPr>
+            <a:r>
+              <a:rPr sz="1500">
+                <a:solidFill>
+                  <a:srgbClr val="22282E"/>
+                </a:solidFill>
+              </a:rPr>
+              <a:t>•  Rate limiting: limitar peticiones por cliente/tiempo. Característica: mitiga abuso, fuerza bruta y DoS (API4).</a:t>
             </a:r>
           </a:p>
         </p:txBody>
@@ -4838,7 +5319,7 @@
                   <a:srgbClr val="0B3D2E"/>
                 </a:solidFill>
               </a:rPr>
-              <a:t>📝 Reto verificable</a:t>
+              <a:t>🧰 Herramientas y preparación</a:t>
             </a:r>
           </a:p>
         </p:txBody>
@@ -4876,67 +5357,52 @@
                   <a:srgbClr val="22282E"/>
                 </a:solidFill>
               </a:rPr>
-              <a:t>•  Asegura una API de extremo a extremo con controles y verificación automatizada.</a:t>
-            </a:r>
-          </a:p>
-          <a:p>
-            <a:pPr>
-              <a:spcAft>
-                <a:spcPts val="600"/>
-              </a:spcAft>
-            </a:pPr>
-            <a:r>
-              <a:rPr sz="1500">
-                <a:solidFill>
-                  <a:srgbClr val="22282E"/>
-                </a:solidFill>
-              </a:rPr>
-              <a:t>•  Criterio de aceptación: (a) el contrato OpenAPI define autenticación, autorización por</a:t>
-            </a:r>
-          </a:p>
-          <a:p>
-            <a:pPr>
-              <a:spcAft>
-                <a:spcPts val="600"/>
-              </a:spcAft>
-            </a:pPr>
-            <a:r>
-              <a:rPr sz="1500">
-                <a:solidFill>
-                  <a:srgbClr val="22282E"/>
-                </a:solidFill>
-              </a:rPr>
-              <a:t>•  endpoint y validación estricta de esquema; (b) los fallos BOLA y BFLA de la API de práctica</a:t>
-            </a:r>
-          </a:p>
-          <a:p>
-            <a:pPr>
-              <a:spcAft>
-                <a:spcPts val="600"/>
-              </a:spcAft>
-            </a:pPr>
-            <a:r>
-              <a:rPr sz="1500">
-                <a:solidFill>
-                  <a:srgbClr val="22282E"/>
-                </a:solidFill>
-              </a:rPr>
-              <a:t>•  están corregidos y verificados; (c) el pipeline lintea el contrato y ejecuta fuzzing basado en</a:t>
-            </a:r>
-          </a:p>
-          <a:p>
-            <a:pPr>
-              <a:spcAft>
-                <a:spcPts val="600"/>
-              </a:spcAft>
-            </a:pPr>
-            <a:r>
-              <a:rPr sz="1500">
-                <a:solidFill>
-                  <a:srgbClr val="22282E"/>
-                </a:solidFill>
-              </a:rPr>
-              <a:t>•  contrato que pasa; y (d) hay rate limiting activo demostrable.</a:t>
+              <a:t>•  OpenAPI (Swagger) para el contrato; Spectral para lintarlo.</a:t>
+            </a:r>
+          </a:p>
+          <a:p>
+            <a:pPr>
+              <a:spcAft>
+                <a:spcPts val="600"/>
+              </a:spcAft>
+            </a:pPr>
+            <a:r>
+              <a:rPr sz="1500">
+                <a:solidFill>
+                  <a:srgbClr val="22282E"/>
+                </a:solidFill>
+              </a:rPr>
+              <a:t>•  Schemathesis o RESTler para fuzzing basado en contrato.</a:t>
+            </a:r>
+          </a:p>
+          <a:p>
+            <a:pPr>
+              <a:spcAft>
+                <a:spcPts val="600"/>
+              </a:spcAft>
+            </a:pPr>
+            <a:r>
+              <a:rPr sz="1500">
+                <a:solidFill>
+                  <a:srgbClr val="22282E"/>
+                </a:solidFill>
+              </a:rPr>
+              <a:t>•  OWASP ZAP con importación de OpenAPI para escaneo dirigido.</a:t>
+            </a:r>
+          </a:p>
+          <a:p>
+            <a:pPr>
+              <a:spcAft>
+                <a:spcPts val="600"/>
+              </a:spcAft>
+            </a:pPr>
+            <a:r>
+              <a:rPr sz="1500">
+                <a:solidFill>
+                  <a:srgbClr val="22282E"/>
+                </a:solidFill>
+              </a:rPr>
+              <a:t>•  Una API de práctica propia (p. ej. crAPI o VAmPI, APIs vulnerables de laboratorio).</a:t>
             </a:r>
           </a:p>
         </p:txBody>
